--- a/lectures/week-08/lecture-zh.pptx
+++ b/lectures/week-08/lecture-zh.pptx
@@ -5514,7 +5514,7 @@
                 </a:solidFill>
                 <a:latin typeface="Source Han Sans SC"/>
               </a:rPr>
-              <a:t>两段代码**参数量完全相同**（166 278），训练轮数相同，数据相同。唯一的差别是“第 96 个位置”还是“最后一个真词”。下一页看这个差别值多少。</a:t>
+              <a:t>两段代码**参数量完全相同**（166,278），训练轮数相同，数据相同。唯一的差别是“第 96 个位置”还是“最后一个真词”。下一页看这个差别值多少。</a:t>
             </a:r>
           </a:p>
         </p:txBody>
@@ -15580,7 +15580,7 @@
                 </a:solidFill>
                 <a:latin typeface="Source Han Sans SC"/>
               </a:rPr>
-              <a:t>• 参数量 166 278</a:t>
+              <a:t>• 参数量 166,278</a:t>
             </a:r>
           </a:p>
           <a:p>
